--- a/Deliverable4/EPL448_Deliverable4.pptx
+++ b/Deliverable4/EPL448_Deliverable4.pptx
@@ -1,6 +1,6 @@
 
 <file path=ppt/presentation.xml><?xml version="1.0" encoding="utf-8"?>
-<p:presentation xmlns:a="http://schemas.openxmlformats.org/drawingml/2006/main" xmlns:r="http://schemas.openxmlformats.org/officeDocument/2006/relationships" xmlns:p="http://schemas.openxmlformats.org/presentationml/2006/main" saveSubsetFonts="1" autoCompressPictures="0">
+<p:presentation xmlns:a="http://schemas.openxmlformats.org/drawingml/2006/main" xmlns:r="http://schemas.openxmlformats.org/officeDocument/2006/relationships" xmlns:p="http://schemas.openxmlformats.org/presentationml/2006/main" removePersonalInfoOnSave="1" saveSubsetFonts="1" autoCompressPictures="0">
   <p:sldMasterIdLst>
     <p:sldMasterId id="2147483728" r:id="rId1"/>
   </p:sldMasterIdLst>
@@ -22886,7 +22886,29 @@
                 <a:ea typeface="Calibri" pitchFamily="34" charset="-122"/>
                 <a:cs typeface="Calibri" pitchFamily="34" charset="-120"/>
               </a:rPr>
-              <a:t>Thank you — Questions?</a:t>
+              <a:t>Thank you. </a:t>
+            </a:r>
+            <a:r>
+              <a:rPr lang="en-US" sz="1600">
+                <a:solidFill>
+                  <a:srgbClr val="ED8B00"/>
+                </a:solidFill>
+                <a:latin typeface="Calibri" pitchFamily="34" charset="0"/>
+                <a:ea typeface="Calibri" pitchFamily="34" charset="-122"/>
+                <a:cs typeface="Calibri" pitchFamily="34" charset="-120"/>
+              </a:rPr>
+              <a:t>Any Questions</a:t>
+            </a:r>
+            <a:r>
+              <a:rPr lang="en-US" sz="1600" dirty="0">
+                <a:solidFill>
+                  <a:srgbClr val="ED8B00"/>
+                </a:solidFill>
+                <a:latin typeface="Calibri" pitchFamily="34" charset="0"/>
+                <a:ea typeface="Calibri" pitchFamily="34" charset="-122"/>
+                <a:cs typeface="Calibri" pitchFamily="34" charset="-120"/>
+              </a:rPr>
+              <a:t>?</a:t>
             </a:r>
             <a:endParaRPr lang="en-US" sz="1600" dirty="0"/>
           </a:p>

--- a/Deliverable4/EPL448_Deliverable4.pptx
+++ b/Deliverable4/EPL448_Deliverable4.pptx
@@ -5734,6 +5734,13 @@
             <a:softEdge rad="0"/>
           </a:effectLst>
         </p:spPr>
+        <p:txBody>
+          <a:bodyPr/>
+          <a:lstStyle/>
+          <a:p>
+            <a:endParaRPr lang="LID4096"/>
+          </a:p>
+        </p:txBody>
       </p:sp>
       <p:sp>
         <p:nvSpPr>
@@ -8560,29 +8567,6 @@
           </a:p>
         </p:txBody>
       </p:sp>
-      <p:pic>
-        <p:nvPicPr>
-          <p:cNvPr id="4" name="Image 0" descr="/home/claude/hires_screening.jpg"/>
-          <p:cNvPicPr>
-            <a:picLocks noChangeAspect="1"/>
-          </p:cNvPicPr>
-          <p:nvPr/>
-        </p:nvPicPr>
-        <p:blipFill>
-          <a:blip r:embed="rId3"/>
-          <a:srcRect/>
-          <a:stretch/>
-        </p:blipFill>
-        <p:spPr>
-          <a:xfrm>
-            <a:off x="274320" y="1051560"/>
-            <a:ext cx="8595360" cy="2743200"/>
-          </a:xfrm>
-          <a:prstGeom prst="rect">
-            <a:avLst/>
-          </a:prstGeom>
-        </p:spPr>
-      </p:pic>
       <p:sp>
         <p:nvSpPr>
           <p:cNvPr id="5" name="Shape 2"/>
@@ -8730,7 +8714,7 @@
           <p:nvPr/>
         </p:nvPicPr>
         <p:blipFill>
-          <a:blip r:embed="rId4"/>
+          <a:blip r:embed="rId3"/>
           <a:srcRect/>
           <a:stretch/>
         </p:blipFill>
@@ -8783,6 +8767,36 @@
           </a:p>
         </p:txBody>
       </p:sp>
+      <p:pic>
+        <p:nvPicPr>
+          <p:cNvPr id="12" name="Picture 11">
+            <a:extLst>
+              <a:ext uri="{FF2B5EF4-FFF2-40B4-BE49-F238E27FC236}">
+                <a16:creationId xmlns:a16="http://schemas.microsoft.com/office/drawing/2014/main" id="{B99C1C17-8E5E-289F-475E-A2714C30616E}"/>
+              </a:ext>
+            </a:extLst>
+          </p:cNvPr>
+          <p:cNvPicPr>
+            <a:picLocks noChangeAspect="1"/>
+          </p:cNvPicPr>
+          <p:nvPr/>
+        </p:nvPicPr>
+        <p:blipFill>
+          <a:blip r:embed="rId4"/>
+          <a:stretch>
+            <a:fillRect/>
+          </a:stretch>
+        </p:blipFill>
+        <p:spPr>
+          <a:xfrm>
+            <a:off x="1446334" y="1035182"/>
+            <a:ext cx="5544515" cy="2737355"/>
+          </a:xfrm>
+          <a:prstGeom prst="rect">
+            <a:avLst/>
+          </a:prstGeom>
+        </p:spPr>
+      </p:pic>
     </p:spTree>
   </p:cSld>
   <p:clrMapOvr>
@@ -15395,29 +15409,6 @@
           </a:p>
         </p:txBody>
       </p:sp>
-      <p:pic>
-        <p:nvPicPr>
-          <p:cNvPr id="4" name="Image 0" descr="/home/claude/hires_residuals.jpg"/>
-          <p:cNvPicPr>
-            <a:picLocks noChangeAspect="1"/>
-          </p:cNvPicPr>
-          <p:nvPr/>
-        </p:nvPicPr>
-        <p:blipFill>
-          <a:blip r:embed="rId3"/>
-          <a:srcRect/>
-          <a:stretch/>
-        </p:blipFill>
-        <p:spPr>
-          <a:xfrm>
-            <a:off x="182880" y="1005840"/>
-            <a:ext cx="8778240" cy="3200400"/>
-          </a:xfrm>
-          <a:prstGeom prst="rect">
-            <a:avLst/>
-          </a:prstGeom>
-        </p:spPr>
-      </p:pic>
       <p:sp>
         <p:nvSpPr>
           <p:cNvPr id="5" name="Shape 2"/>
@@ -15554,7 +15545,7 @@
           <p:nvPr/>
         </p:nvPicPr>
         <p:blipFill>
-          <a:blip r:embed="rId4"/>
+          <a:blip r:embed="rId3"/>
           <a:srcRect/>
           <a:stretch/>
         </p:blipFill>
@@ -15607,6 +15598,80 @@
           </a:p>
         </p:txBody>
       </p:sp>
+      <p:grpSp>
+        <p:nvGrpSpPr>
+          <p:cNvPr id="13" name="Group 12">
+            <a:extLst>
+              <a:ext uri="{FF2B5EF4-FFF2-40B4-BE49-F238E27FC236}">
+                <a16:creationId xmlns:a16="http://schemas.microsoft.com/office/drawing/2014/main" id="{EAA39DB9-A522-9434-3477-137C1411BC8A}"/>
+              </a:ext>
+            </a:extLst>
+          </p:cNvPr>
+          <p:cNvGrpSpPr/>
+          <p:nvPr/>
+        </p:nvGrpSpPr>
+        <p:grpSpPr>
+          <a:xfrm>
+            <a:off x="182880" y="1005840"/>
+            <a:ext cx="8778240" cy="3200400"/>
+            <a:chOff x="182880" y="1005840"/>
+            <a:chExt cx="8778240" cy="3200400"/>
+          </a:xfrm>
+        </p:grpSpPr>
+        <p:pic>
+          <p:nvPicPr>
+            <p:cNvPr id="4" name="Image 0" descr="/home/claude/hires_residuals.jpg"/>
+            <p:cNvPicPr>
+              <a:picLocks noChangeAspect="1"/>
+            </p:cNvPicPr>
+            <p:nvPr/>
+          </p:nvPicPr>
+          <p:blipFill>
+            <a:blip r:embed="rId4"/>
+            <a:srcRect/>
+            <a:stretch/>
+          </p:blipFill>
+          <p:spPr>
+            <a:xfrm>
+              <a:off x="182880" y="1005840"/>
+              <a:ext cx="8778240" cy="3200400"/>
+            </a:xfrm>
+            <a:prstGeom prst="rect">
+              <a:avLst/>
+            </a:prstGeom>
+          </p:spPr>
+        </p:pic>
+        <p:pic>
+          <p:nvPicPr>
+            <p:cNvPr id="12" name="Picture 11">
+              <a:extLst>
+                <a:ext uri="{FF2B5EF4-FFF2-40B4-BE49-F238E27FC236}">
+                  <a16:creationId xmlns:a16="http://schemas.microsoft.com/office/drawing/2014/main" id="{6FEE9420-316B-9401-DFED-02975808561B}"/>
+                </a:ext>
+              </a:extLst>
+            </p:cNvPr>
+            <p:cNvPicPr>
+              <a:picLocks noChangeAspect="1"/>
+            </p:cNvPicPr>
+            <p:nvPr/>
+          </p:nvPicPr>
+          <p:blipFill>
+            <a:blip r:embed="rId5"/>
+            <a:stretch>
+              <a:fillRect/>
+            </a:stretch>
+          </p:blipFill>
+          <p:spPr>
+            <a:xfrm>
+              <a:off x="958361" y="1005841"/>
+              <a:ext cx="7543801" cy="1803301"/>
+            </a:xfrm>
+            <a:prstGeom prst="rect">
+              <a:avLst/>
+            </a:prstGeom>
+          </p:spPr>
+        </p:pic>
+      </p:grpSp>
     </p:spTree>
   </p:cSld>
   <p:clrMapOvr>
@@ -18877,29 +18942,6 @@
           </a:p>
         </p:txBody>
       </p:sp>
-      <p:pic>
-        <p:nvPicPr>
-          <p:cNvPr id="4" name="Image 0" descr="/home/claude/hires_feature_importance.jpg"/>
-          <p:cNvPicPr>
-            <a:picLocks noChangeAspect="1"/>
-          </p:cNvPicPr>
-          <p:nvPr/>
-        </p:nvPicPr>
-        <p:blipFill>
-          <a:blip r:embed="rId3"/>
-          <a:srcRect/>
-          <a:stretch/>
-        </p:blipFill>
-        <p:spPr>
-          <a:xfrm>
-            <a:off x="365760" y="1051560"/>
-            <a:ext cx="4846320" cy="3291840"/>
-          </a:xfrm>
-          <a:prstGeom prst="rect">
-            <a:avLst/>
-          </a:prstGeom>
-        </p:spPr>
-      </p:pic>
       <p:sp>
         <p:nvSpPr>
           <p:cNvPr id="5" name="Shape 2"/>
@@ -19088,7 +19130,7 @@
           <p:nvPr/>
         </p:nvPicPr>
         <p:blipFill>
-          <a:blip r:embed="rId4"/>
+          <a:blip r:embed="rId3"/>
           <a:srcRect/>
           <a:stretch/>
         </p:blipFill>
@@ -19141,6 +19183,36 @@
           </a:p>
         </p:txBody>
       </p:sp>
+      <p:pic>
+        <p:nvPicPr>
+          <p:cNvPr id="12" name="Picture 11">
+            <a:extLst>
+              <a:ext uri="{FF2B5EF4-FFF2-40B4-BE49-F238E27FC236}">
+                <a16:creationId xmlns:a16="http://schemas.microsoft.com/office/drawing/2014/main" id="{ABB2ACFB-E53B-F677-1717-312E51D35392}"/>
+              </a:ext>
+            </a:extLst>
+          </p:cNvPr>
+          <p:cNvPicPr>
+            <a:picLocks noChangeAspect="1"/>
+          </p:cNvPicPr>
+          <p:nvPr/>
+        </p:nvPicPr>
+        <p:blipFill>
+          <a:blip r:embed="rId4"/>
+          <a:stretch>
+            <a:fillRect/>
+          </a:stretch>
+        </p:blipFill>
+        <p:spPr>
+          <a:xfrm>
+            <a:off x="484632" y="1097280"/>
+            <a:ext cx="4930383" cy="3200400"/>
+          </a:xfrm>
+          <a:prstGeom prst="rect">
+            <a:avLst/>
+          </a:prstGeom>
+        </p:spPr>
+      </p:pic>
     </p:spTree>
   </p:cSld>
   <p:clrMapOvr>
@@ -22886,29 +22958,7 @@
                 <a:ea typeface="Calibri" pitchFamily="34" charset="-122"/>
                 <a:cs typeface="Calibri" pitchFamily="34" charset="-120"/>
               </a:rPr>
-              <a:t>Thank you. </a:t>
-            </a:r>
-            <a:r>
-              <a:rPr lang="en-US" sz="1600">
-                <a:solidFill>
-                  <a:srgbClr val="ED8B00"/>
-                </a:solidFill>
-                <a:latin typeface="Calibri" pitchFamily="34" charset="0"/>
-                <a:ea typeface="Calibri" pitchFamily="34" charset="-122"/>
-                <a:cs typeface="Calibri" pitchFamily="34" charset="-120"/>
-              </a:rPr>
-              <a:t>Any Questions</a:t>
-            </a:r>
-            <a:r>
-              <a:rPr lang="en-US" sz="1600" dirty="0">
-                <a:solidFill>
-                  <a:srgbClr val="ED8B00"/>
-                </a:solidFill>
-                <a:latin typeface="Calibri" pitchFamily="34" charset="0"/>
-                <a:ea typeface="Calibri" pitchFamily="34" charset="-122"/>
-                <a:cs typeface="Calibri" pitchFamily="34" charset="-120"/>
-              </a:rPr>
-              <a:t>?</a:t>
+              <a:t>Thank you. Any Questions?</a:t>
             </a:r>
             <a:endParaRPr lang="en-US" sz="1600" dirty="0"/>
           </a:p>
